--- a/week_3/Postgres_architecture.pptx
+++ b/week_3/Postgres_architecture.pptx
@@ -402,7 +402,42 @@
           <a:bodyPr/>
           <a:lstStyle/>
           <a:p>
-            <a:endParaRPr lang="en-US" dirty="0"/>
+            <a:r>
+              <a:rPr lang="en-US" dirty="0"/>
+              <a:t>“Transactions give us ACID guarantees. </a:t>
+            </a:r>
+            <a:r>
+              <a:rPr lang="en-US" b="1" dirty="0"/>
+              <a:t>Atomicity</a:t>
+            </a:r>
+            <a:r>
+              <a:rPr lang="en-US" dirty="0"/>
+              <a:t> means a transaction’s statements all succeed together or none do. </a:t>
+            </a:r>
+            <a:r>
+              <a:rPr lang="en-US" b="1" dirty="0"/>
+              <a:t>Consistency</a:t>
+            </a:r>
+            <a:r>
+              <a:rPr lang="en-US" dirty="0"/>
+              <a:t> means we move the database from one valid state to another. </a:t>
+            </a:r>
+            <a:r>
+              <a:rPr lang="en-US" b="1" dirty="0"/>
+              <a:t>Isolation</a:t>
+            </a:r>
+            <a:r>
+              <a:rPr lang="en-US" dirty="0"/>
+              <a:t> means concurrent transactions don’t see each other’s intermediate results. </a:t>
+            </a:r>
+            <a:r>
+              <a:rPr lang="en-US" b="1" dirty="0"/>
+              <a:t>Durability</a:t>
+            </a:r>
+            <a:r>
+              <a:rPr lang="en-US" dirty="0"/>
+              <a:t> means once we commit, it sticks—even if the server crashes. The money-transfer example on the slide demonstrates the pattern: begin, debit, credit, commit.”</a:t>
+            </a:r>
           </a:p>
         </p:txBody>
       </p:sp>
@@ -493,6 +528,53 @@
           <a:bodyPr/>
           <a:lstStyle/>
           <a:p>
+            <a:pPr marL="0" marR="0" lvl="0" indent="0" algn="l" defTabSz="914400" rtl="0" eaLnBrk="1" fontAlgn="auto" latinLnBrk="0" hangingPunct="1">
+              <a:lnSpc>
+                <a:spcPct val="100000"/>
+              </a:lnSpc>
+              <a:spcBef>
+                <a:spcPts val="0"/>
+              </a:spcBef>
+              <a:spcAft>
+                <a:spcPts val="0"/>
+              </a:spcAft>
+              <a:buClrTx/>
+              <a:buSzTx/>
+              <a:buFontTx/>
+              <a:buNone/>
+              <a:tabLst/>
+              <a:defRPr/>
+            </a:pPr>
+            <a:r>
+              <a:rPr lang="en-US" dirty="0"/>
+              <a:t>“MVCC lets readers and writers proceed without stepping on each other. When a row is updated, Postgres writes a </a:t>
+            </a:r>
+            <a:r>
+              <a:rPr lang="en-US" b="1" dirty="0"/>
+              <a:t>new version</a:t>
+            </a:r>
+            <a:r>
+              <a:rPr lang="en-US" dirty="0"/>
+              <a:t> instead of overwriting in place. Readers see a </a:t>
+            </a:r>
+            <a:r>
+              <a:rPr lang="en-US" b="1" dirty="0"/>
+              <a:t>snapshot</a:t>
+            </a:r>
+            <a:r>
+              <a:rPr lang="en-US" dirty="0"/>
+              <a:t>—the version that was valid when their transaction started—so they never block on writers. Writers proceed by creating the new version. Later, </a:t>
+            </a:r>
+            <a:r>
+              <a:rPr lang="en-US" b="1" dirty="0"/>
+              <a:t>VACUUM</a:t>
+            </a:r>
+            <a:r>
+              <a:rPr lang="en-US" dirty="0"/>
+              <a:t> cleans up dead versions. The result: fantastic concurrent throughput with minimal locking.”</a:t>
+            </a:r>
+          </a:p>
+          <a:p>
             <a:endParaRPr lang="en-US" dirty="0"/>
           </a:p>
         </p:txBody>
@@ -584,7 +666,93 @@
           <a:bodyPr/>
           <a:lstStyle/>
           <a:p>
-            <a:endParaRPr lang="en-US" dirty="0"/>
+            <a:r>
+              <a:rPr lang="en-US" dirty="0"/>
+              <a:t>“Postgres stores metadata about everything—tables, columns, types, indexes—in </a:t>
+            </a:r>
+            <a:r>
+              <a:rPr lang="en-US" b="1" dirty="0"/>
+              <a:t>system catalog tables</a:t>
+            </a:r>
+            <a:r>
+              <a:rPr lang="en-US" dirty="0"/>
+              <a:t>. They’re real tables you can query, like </a:t>
+            </a:r>
+            <a:r>
+              <a:rPr lang="en-US" sz="1200" kern="1200" dirty="0" err="1">
+                <a:solidFill>
+                  <a:schemeClr val="tx1"/>
+                </a:solidFill>
+                <a:latin typeface="+mn-lt"/>
+                <a:ea typeface="+mn-ea"/>
+                <a:cs typeface="+mn-cs"/>
+              </a:rPr>
+              <a:t>pg_class</a:t>
+            </a:r>
+            <a:r>
+              <a:rPr lang="en-US" dirty="0"/>
+              <a:t> and </a:t>
+            </a:r>
+            <a:r>
+              <a:rPr lang="en-US" sz="1200" kern="1200" dirty="0" err="1">
+                <a:solidFill>
+                  <a:schemeClr val="tx1"/>
+                </a:solidFill>
+                <a:latin typeface="+mn-lt"/>
+                <a:ea typeface="+mn-ea"/>
+                <a:cs typeface="+mn-cs"/>
+              </a:rPr>
+              <a:t>pg_type</a:t>
+            </a:r>
+            <a:r>
+              <a:rPr lang="en-US" dirty="0"/>
+              <a:t>. You should never edit them directly; you use standard DDL—</a:t>
+            </a:r>
+            <a:r>
+              <a:rPr lang="en-US" sz="1200" kern="1200" dirty="0">
+                <a:solidFill>
+                  <a:schemeClr val="tx1"/>
+                </a:solidFill>
+                <a:latin typeface="+mn-lt"/>
+                <a:ea typeface="+mn-ea"/>
+                <a:cs typeface="+mn-cs"/>
+              </a:rPr>
+              <a:t>CREATE</a:t>
+            </a:r>
+            <a:r>
+              <a:rPr lang="en-US" dirty="0"/>
+              <a:t>, </a:t>
+            </a:r>
+            <a:r>
+              <a:rPr lang="en-US" sz="1200" kern="1200" dirty="0">
+                <a:solidFill>
+                  <a:schemeClr val="tx1"/>
+                </a:solidFill>
+                <a:latin typeface="+mn-lt"/>
+                <a:ea typeface="+mn-ea"/>
+                <a:cs typeface="+mn-cs"/>
+              </a:rPr>
+              <a:t>ALTER</a:t>
+            </a:r>
+            <a:r>
+              <a:rPr lang="en-US" dirty="0"/>
+              <a:t>, </a:t>
+            </a:r>
+            <a:r>
+              <a:rPr lang="en-US" sz="1200" kern="1200" dirty="0">
+                <a:solidFill>
+                  <a:schemeClr val="tx1"/>
+                </a:solidFill>
+                <a:latin typeface="+mn-lt"/>
+                <a:ea typeface="+mn-ea"/>
+                <a:cs typeface="+mn-cs"/>
+              </a:rPr>
+              <a:t>DROP</a:t>
+            </a:r>
+            <a:r>
+              <a:rPr lang="en-US" dirty="0"/>
+              <a:t>—and Postgres updates the catalogs for you. Being comfortable querying these catalogs is a superpower for audits, migrations, and tooling.”</a:t>
+            </a:r>
           </a:p>
         </p:txBody>
       </p:sp>
@@ -675,6 +843,113 @@
           <a:bodyPr/>
           <a:lstStyle/>
           <a:p>
+            <a:pPr marL="0" marR="0" lvl="0" indent="0" algn="l" defTabSz="914400" rtl="0" eaLnBrk="1" fontAlgn="auto" latinLnBrk="0" hangingPunct="1">
+              <a:lnSpc>
+                <a:spcPct val="100000"/>
+              </a:lnSpc>
+              <a:spcBef>
+                <a:spcPts val="0"/>
+              </a:spcBef>
+              <a:spcAft>
+                <a:spcPts val="0"/>
+              </a:spcAft>
+              <a:buClrTx/>
+              <a:buSzTx/>
+              <a:buFontTx/>
+              <a:buNone/>
+              <a:tabLst/>
+              <a:defRPr/>
+            </a:pPr>
+            <a:r>
+              <a:rPr lang="en-US" dirty="0"/>
+              <a:t>“</a:t>
+            </a:r>
+            <a:r>
+              <a:rPr lang="en-US" dirty="0" err="1"/>
+              <a:t>Supabase</a:t>
+            </a:r>
+            <a:r>
+              <a:rPr lang="en-US" dirty="0"/>
+              <a:t> layers modern services on top of PostgreSQL. </a:t>
+            </a:r>
+            <a:r>
+              <a:rPr lang="en-US" b="1" dirty="0" err="1"/>
+              <a:t>GoTrue</a:t>
+            </a:r>
+            <a:r>
+              <a:rPr lang="en-US" dirty="0"/>
+              <a:t> handles authentication and user management with JWTs. </a:t>
+            </a:r>
+            <a:r>
+              <a:rPr lang="en-US" b="1" dirty="0" err="1"/>
+              <a:t>PostgREST</a:t>
+            </a:r>
+            <a:r>
+              <a:rPr lang="en-US" dirty="0"/>
+              <a:t> automatically exposes your tables as a REST API so you don’t have to write controllers. </a:t>
+            </a:r>
+            <a:r>
+              <a:rPr lang="en-US" b="1" dirty="0"/>
+              <a:t>Realtime</a:t>
+            </a:r>
+            <a:r>
+              <a:rPr lang="en-US" dirty="0"/>
+              <a:t> streams database changes over </a:t>
+            </a:r>
+            <a:r>
+              <a:rPr lang="en-US" dirty="0" err="1"/>
+              <a:t>WebSockets</a:t>
+            </a:r>
+            <a:r>
+              <a:rPr lang="en-US" dirty="0"/>
+              <a:t> using logical replication. </a:t>
+            </a:r>
+            <a:r>
+              <a:rPr lang="en-US" b="1" dirty="0"/>
+              <a:t>Storage</a:t>
+            </a:r>
+            <a:r>
+              <a:rPr lang="en-US" dirty="0"/>
+              <a:t> provides S3-compatible object storage. </a:t>
+            </a:r>
+            <a:r>
+              <a:rPr lang="en-US" b="1" dirty="0"/>
+              <a:t>Edge Functions</a:t>
+            </a:r>
+            <a:r>
+              <a:rPr lang="en-US" dirty="0"/>
+              <a:t> run serverless code in Deno. There’s also </a:t>
+            </a:r>
+            <a:r>
+              <a:rPr lang="en-US" b="1" dirty="0" err="1"/>
+              <a:t>postgres</a:t>
+            </a:r>
+            <a:r>
+              <a:rPr lang="en-US" b="1" dirty="0"/>
+              <a:t>-meta</a:t>
+            </a:r>
+            <a:r>
+              <a:rPr lang="en-US" dirty="0"/>
+              <a:t> for schema management, </a:t>
+            </a:r>
+            <a:r>
+              <a:rPr lang="en-US" b="1" dirty="0" err="1"/>
+              <a:t>Supavisor</a:t>
+            </a:r>
+            <a:r>
+              <a:rPr lang="en-US" dirty="0"/>
+              <a:t> for connection pooling, and </a:t>
+            </a:r>
+            <a:r>
+              <a:rPr lang="en-US" b="1" dirty="0"/>
+              <a:t>Kong</a:t>
+            </a:r>
+            <a:r>
+              <a:rPr lang="en-US" dirty="0"/>
+              <a:t> as the API gateway. The key idea: it’s still Postgres at the core, but with batteries included.”</a:t>
+            </a:r>
+          </a:p>
+          <a:p>
             <a:endParaRPr lang="en-US" dirty="0"/>
           </a:p>
         </p:txBody>
@@ -766,7 +1041,65 @@
           <a:bodyPr/>
           <a:lstStyle/>
           <a:p>
-            <a:endParaRPr lang="en-US" dirty="0"/>
+            <a:r>
+              <a:rPr lang="en-US" dirty="0"/>
+              <a:t>“Because </a:t>
+            </a:r>
+            <a:r>
+              <a:rPr lang="en-US" dirty="0" err="1"/>
+              <a:t>Supabase</a:t>
+            </a:r>
+            <a:r>
+              <a:rPr lang="en-US" dirty="0"/>
+              <a:t> uses Postgres under the hood, all of your SQL skills apply directly: schema design, indexes, transactions, and RLS policies. </a:t>
+            </a:r>
+            <a:r>
+              <a:rPr lang="en-US" b="1" dirty="0" err="1"/>
+              <a:t>PostgREST</a:t>
+            </a:r>
+            <a:r>
+              <a:rPr lang="en-US" dirty="0"/>
+              <a:t> translates table and view access into REST endpoints, </a:t>
+            </a:r>
+            <a:r>
+              <a:rPr lang="en-US" b="1" dirty="0" err="1"/>
+              <a:t>GoTrue</a:t>
+            </a:r>
+            <a:r>
+              <a:rPr lang="en-US" dirty="0"/>
+              <a:t> integrates cleanly with row-level security so you can write data-driven access rules, and </a:t>
+            </a:r>
+            <a:r>
+              <a:rPr lang="en-US" b="1" dirty="0"/>
+              <a:t>Realtime</a:t>
+            </a:r>
+            <a:r>
+              <a:rPr lang="en-US" dirty="0"/>
+              <a:t> streams changes out to clients for live UIs. You can manage with </a:t>
+            </a:r>
+            <a:r>
+              <a:rPr lang="en-US" dirty="0" err="1"/>
+              <a:t>Supabase</a:t>
+            </a:r>
+            <a:r>
+              <a:rPr lang="en-US" dirty="0"/>
+              <a:t> Studio and the CLI, or just connect with </a:t>
+            </a:r>
+            <a:r>
+              <a:rPr lang="en-US" sz="1200" kern="1200" dirty="0" err="1">
+                <a:solidFill>
+                  <a:schemeClr val="tx1"/>
+                </a:solidFill>
+                <a:latin typeface="+mn-lt"/>
+                <a:ea typeface="+mn-ea"/>
+                <a:cs typeface="+mn-cs"/>
+              </a:rPr>
+              <a:t>psql</a:t>
+            </a:r>
+            <a:r>
+              <a:rPr lang="en-US" dirty="0"/>
+              <a:t>—your choice.</a:t>
+            </a:r>
           </a:p>
         </p:txBody>
       </p:sp>
@@ -857,7 +1190,189 @@
           <a:bodyPr/>
           <a:lstStyle/>
           <a:p>
-            <a:endParaRPr lang="en-US" dirty="0"/>
+            <a:r>
+              <a:rPr lang="en-US" dirty="0"/>
+              <a:t>“Here’s a minimal local workflow. First, install the CLI: </a:t>
+            </a:r>
+            <a:r>
+              <a:rPr lang="en-US" sz="1200" kern="1200" dirty="0" err="1">
+                <a:solidFill>
+                  <a:schemeClr val="tx1"/>
+                </a:solidFill>
+                <a:latin typeface="+mn-lt"/>
+                <a:ea typeface="+mn-ea"/>
+                <a:cs typeface="+mn-cs"/>
+              </a:rPr>
+              <a:t>npm</a:t>
+            </a:r>
+            <a:r>
+              <a:rPr lang="en-US" sz="1200" kern="1200" dirty="0">
+                <a:solidFill>
+                  <a:schemeClr val="tx1"/>
+                </a:solidFill>
+                <a:latin typeface="+mn-lt"/>
+                <a:ea typeface="+mn-ea"/>
+                <a:cs typeface="+mn-cs"/>
+              </a:rPr>
+              <a:t> install -g </a:t>
+            </a:r>
+            <a:r>
+              <a:rPr lang="en-US" sz="1200" kern="1200" dirty="0" err="1">
+                <a:solidFill>
+                  <a:schemeClr val="tx1"/>
+                </a:solidFill>
+                <a:latin typeface="+mn-lt"/>
+                <a:ea typeface="+mn-ea"/>
+                <a:cs typeface="+mn-cs"/>
+              </a:rPr>
+              <a:t>supabase</a:t>
+            </a:r>
+            <a:r>
+              <a:rPr lang="en-US" dirty="0"/>
+              <a:t>. Second, run </a:t>
+            </a:r>
+            <a:r>
+              <a:rPr lang="en-US" sz="1200" kern="1200" dirty="0" err="1">
+                <a:solidFill>
+                  <a:schemeClr val="tx1"/>
+                </a:solidFill>
+                <a:latin typeface="+mn-lt"/>
+                <a:ea typeface="+mn-ea"/>
+                <a:cs typeface="+mn-cs"/>
+              </a:rPr>
+              <a:t>supabase</a:t>
+            </a:r>
+            <a:r>
+              <a:rPr lang="en-US" sz="1200" kern="1200" dirty="0">
+                <a:solidFill>
+                  <a:schemeClr val="tx1"/>
+                </a:solidFill>
+                <a:latin typeface="+mn-lt"/>
+                <a:ea typeface="+mn-ea"/>
+                <a:cs typeface="+mn-cs"/>
+              </a:rPr>
+              <a:t> </a:t>
+            </a:r>
+            <a:r>
+              <a:rPr lang="en-US" sz="1200" kern="1200" dirty="0" err="1">
+                <a:solidFill>
+                  <a:schemeClr val="tx1"/>
+                </a:solidFill>
+                <a:latin typeface="+mn-lt"/>
+                <a:ea typeface="+mn-ea"/>
+                <a:cs typeface="+mn-cs"/>
+              </a:rPr>
+              <a:t>init</a:t>
+            </a:r>
+            <a:r>
+              <a:rPr lang="en-US" dirty="0"/>
+              <a:t> to create the project files. Third, run </a:t>
+            </a:r>
+            <a:r>
+              <a:rPr lang="en-US" sz="1200" kern="1200" dirty="0" err="1">
+                <a:solidFill>
+                  <a:schemeClr val="tx1"/>
+                </a:solidFill>
+                <a:latin typeface="+mn-lt"/>
+                <a:ea typeface="+mn-ea"/>
+                <a:cs typeface="+mn-cs"/>
+              </a:rPr>
+              <a:t>supabase</a:t>
+            </a:r>
+            <a:r>
+              <a:rPr lang="en-US" sz="1200" kern="1200" dirty="0">
+                <a:solidFill>
+                  <a:schemeClr val="tx1"/>
+                </a:solidFill>
+                <a:latin typeface="+mn-lt"/>
+                <a:ea typeface="+mn-ea"/>
+                <a:cs typeface="+mn-cs"/>
+              </a:rPr>
+              <a:t> start</a:t>
+            </a:r>
+            <a:r>
+              <a:rPr lang="en-US" dirty="0"/>
+              <a:t> to spin up a local stack—Postgres, </a:t>
+            </a:r>
+            <a:r>
+              <a:rPr lang="en-US" dirty="0" err="1"/>
+              <a:t>GoTrue</a:t>
+            </a:r>
+            <a:r>
+              <a:rPr lang="en-US" dirty="0"/>
+              <a:t>, </a:t>
+            </a:r>
+            <a:r>
+              <a:rPr lang="en-US" dirty="0" err="1"/>
+              <a:t>PostgREST</a:t>
+            </a:r>
+            <a:r>
+              <a:rPr lang="en-US" dirty="0"/>
+              <a:t>, and Realtime—all running on your machine so you can develop offline. Finally, </a:t>
+            </a:r>
+            <a:r>
+              <a:rPr lang="en-US" sz="1200" kern="1200" dirty="0" err="1">
+                <a:solidFill>
+                  <a:schemeClr val="tx1"/>
+                </a:solidFill>
+                <a:latin typeface="+mn-lt"/>
+                <a:ea typeface="+mn-ea"/>
+                <a:cs typeface="+mn-cs"/>
+              </a:rPr>
+              <a:t>supabase</a:t>
+            </a:r>
+            <a:r>
+              <a:rPr lang="en-US" sz="1200" kern="1200" dirty="0">
+                <a:solidFill>
+                  <a:schemeClr val="tx1"/>
+                </a:solidFill>
+                <a:latin typeface="+mn-lt"/>
+                <a:ea typeface="+mn-ea"/>
+                <a:cs typeface="+mn-cs"/>
+              </a:rPr>
+              <a:t> </a:t>
+            </a:r>
+            <a:r>
+              <a:rPr lang="en-US" sz="1200" kern="1200" dirty="0" err="1">
+                <a:solidFill>
+                  <a:schemeClr val="tx1"/>
+                </a:solidFill>
+                <a:latin typeface="+mn-lt"/>
+                <a:ea typeface="+mn-ea"/>
+                <a:cs typeface="+mn-cs"/>
+              </a:rPr>
+              <a:t>db</a:t>
+            </a:r>
+            <a:r>
+              <a:rPr lang="en-US" sz="1200" kern="1200" dirty="0">
+                <a:solidFill>
+                  <a:schemeClr val="tx1"/>
+                </a:solidFill>
+                <a:latin typeface="+mn-lt"/>
+                <a:ea typeface="+mn-ea"/>
+                <a:cs typeface="+mn-cs"/>
+              </a:rPr>
+              <a:t> connect</a:t>
+            </a:r>
+            <a:r>
+              <a:rPr lang="en-US" dirty="0"/>
+              <a:t> drops you into </a:t>
+            </a:r>
+            <a:r>
+              <a:rPr lang="en-US" sz="1200" kern="1200" dirty="0" err="1">
+                <a:solidFill>
+                  <a:schemeClr val="tx1"/>
+                </a:solidFill>
+                <a:latin typeface="+mn-lt"/>
+                <a:ea typeface="+mn-ea"/>
+                <a:cs typeface="+mn-cs"/>
+              </a:rPr>
+              <a:t>psql</a:t>
+            </a:r>
+            <a:r>
+              <a:rPr lang="en-US" dirty="0"/>
+              <a:t> for direct SQL access. This makes local iteration fast and realistic.”</a:t>
+            </a:r>
           </a:p>
         </p:txBody>
       </p:sp>
@@ -948,7 +1463,42 @@
           <a:bodyPr/>
           <a:lstStyle/>
           <a:p>
-            <a:endParaRPr lang="en-US" dirty="0"/>
+            <a:r>
+              <a:rPr lang="en-US" dirty="0"/>
+              <a:t>“Summing up: PostgreSQL is a client–server database that isolates connections into backends. Clusters hold multiple databases; databases group schemas and objects. Performance and durability come from the physical layout, shared buffers, and WAL. Background processes—</a:t>
+            </a:r>
+            <a:r>
+              <a:rPr lang="en-US" dirty="0" err="1"/>
+              <a:t>autovacuum</a:t>
+            </a:r>
+            <a:r>
+              <a:rPr lang="en-US" dirty="0"/>
+              <a:t>, writers, and </a:t>
+            </a:r>
+            <a:r>
+              <a:rPr lang="en-US" dirty="0" err="1"/>
+              <a:t>checkpointers</a:t>
+            </a:r>
+            <a:r>
+              <a:rPr lang="en-US" dirty="0"/>
+              <a:t>—work continuously in the background. Transactions are ACID; MVCC gives us high concurrency. System catalogs are the authoritative metadata. And </a:t>
+            </a:r>
+            <a:r>
+              <a:rPr lang="en-US" dirty="0" err="1"/>
+              <a:t>Supabase</a:t>
+            </a:r>
+            <a:r>
+              <a:rPr lang="en-US" dirty="0"/>
+              <a:t> builds on Postgres to add auth, REST, </a:t>
+            </a:r>
+            <a:r>
+              <a:rPr lang="en-US" dirty="0" err="1"/>
+              <a:t>realtime</a:t>
+            </a:r>
+            <a:r>
+              <a:rPr lang="en-US" dirty="0"/>
+              <a:t>, storage, and edge functions while preserving full SQL power.”</a:t>
+            </a:r>
           </a:p>
         </p:txBody>
       </p:sp>
@@ -1039,6 +1589,58 @@
           <a:bodyPr/>
           <a:lstStyle/>
           <a:p>
+            <a:r>
+              <a:rPr lang="en-US" dirty="0"/>
+              <a:t>“Let’s sanity-check the concepts.</a:t>
+            </a:r>
+          </a:p>
+          <a:p>
+            <a:r>
+              <a:rPr lang="en-US" dirty="0"/>
+              <a:t>What does </a:t>
+            </a:r>
+            <a:r>
+              <a:rPr lang="en-US" dirty="0" err="1"/>
+              <a:t>autovacuum</a:t>
+            </a:r>
+            <a:r>
+              <a:rPr lang="en-US" dirty="0"/>
+              <a:t> do and why is it essential for healthy tables?</a:t>
+            </a:r>
+          </a:p>
+          <a:p>
+            <a:r>
+              <a:rPr lang="en-US" dirty="0"/>
+              <a:t>How does MVCC let readers and writers proceed concurrently without blocking?</a:t>
+            </a:r>
+          </a:p>
+          <a:p>
+            <a:r>
+              <a:rPr lang="en-US" dirty="0"/>
+              <a:t>What’s the difference between a cluster, a database, and a schema?</a:t>
+            </a:r>
+          </a:p>
+          <a:p>
+            <a:r>
+              <a:rPr lang="en-US" dirty="0"/>
+              <a:t>If the server crashes, what role does WAL play during recovery?</a:t>
+            </a:r>
+          </a:p>
+          <a:p>
+            <a:r>
+              <a:rPr lang="en-US" dirty="0"/>
+              <a:t>How does </a:t>
+            </a:r>
+            <a:r>
+              <a:rPr lang="en-US" dirty="0" err="1"/>
+              <a:t>Supabase</a:t>
+            </a:r>
+            <a:r>
+              <a:rPr lang="en-US" dirty="0"/>
+              <a:t> expose Postgres to developers while adding value?”</a:t>
+            </a:r>
+          </a:p>
+          <a:p>
             <a:endParaRPr lang="en-US" dirty="0"/>
           </a:p>
         </p:txBody>
@@ -1130,6 +1732,75 @@
           <a:bodyPr/>
           <a:lstStyle/>
           <a:p>
+            <a:r>
+              <a:rPr lang="en-US" dirty="0"/>
+              <a:t>“For deeper study: read the PostgreSQL architectural overview and the </a:t>
+            </a:r>
+            <a:r>
+              <a:rPr lang="en-US" dirty="0" err="1"/>
+              <a:t>Wikibook</a:t>
+            </a:r>
+            <a:r>
+              <a:rPr lang="en-US" dirty="0"/>
+              <a:t> sections on processes, RAM, files, transactions, and MVCC. Explore the system catalogs with a quick </a:t>
+            </a:r>
+            <a:r>
+              <a:rPr lang="en-US" sz="1200" kern="1200" dirty="0">
+                <a:solidFill>
+                  <a:schemeClr val="tx1"/>
+                </a:solidFill>
+                <a:latin typeface="+mn-lt"/>
+                <a:ea typeface="+mn-ea"/>
+                <a:cs typeface="+mn-cs"/>
+              </a:rPr>
+              <a:t>SELECT * FROM </a:t>
+            </a:r>
+            <a:r>
+              <a:rPr lang="en-US" sz="1200" kern="1200" dirty="0" err="1">
+                <a:solidFill>
+                  <a:schemeClr val="tx1"/>
+                </a:solidFill>
+                <a:latin typeface="+mn-lt"/>
+                <a:ea typeface="+mn-ea"/>
+                <a:cs typeface="+mn-cs"/>
+              </a:rPr>
+              <a:t>pg_class</a:t>
+            </a:r>
+            <a:r>
+              <a:rPr lang="en-US" sz="1200" kern="1200" dirty="0">
+                <a:solidFill>
+                  <a:schemeClr val="tx1"/>
+                </a:solidFill>
+                <a:latin typeface="+mn-lt"/>
+                <a:ea typeface="+mn-ea"/>
+                <a:cs typeface="+mn-cs"/>
+              </a:rPr>
+              <a:t> LIMIT 5;</a:t>
+            </a:r>
+            <a:r>
+              <a:rPr lang="en-US" dirty="0"/>
+              <a:t>. In </a:t>
+            </a:r>
+            <a:r>
+              <a:rPr lang="en-US" dirty="0" err="1"/>
+              <a:t>Supabase</a:t>
+            </a:r>
+            <a:r>
+              <a:rPr lang="en-US" dirty="0"/>
+              <a:t>, read the architecture, auth, storage, and </a:t>
+            </a:r>
+            <a:r>
+              <a:rPr lang="en-US" dirty="0" err="1"/>
+              <a:t>realtime</a:t>
+            </a:r>
+            <a:r>
+              <a:rPr lang="en-US" dirty="0"/>
+              <a:t> docs, and try the CLI on your machine. </a:t>
+            </a:r>
+            <a:r>
+              <a:rPr lang="en-US"/>
+              <a:t>Hands-on time with these tools will make all of today’s pieces click.”</a:t>
+            </a:r>
             <a:endParaRPr lang="en-US" dirty="0"/>
           </a:p>
         </p:txBody>
@@ -1312,6 +1983,53 @@
           <a:bodyPr/>
           <a:lstStyle/>
           <a:p>
+            <a:pPr marL="0" marR="0" lvl="0" indent="0" algn="l" defTabSz="914400" rtl="0" eaLnBrk="1" fontAlgn="auto" latinLnBrk="0" hangingPunct="1">
+              <a:lnSpc>
+                <a:spcPct val="100000"/>
+              </a:lnSpc>
+              <a:spcBef>
+                <a:spcPts val="0"/>
+              </a:spcBef>
+              <a:spcAft>
+                <a:spcPts val="0"/>
+              </a:spcAft>
+              <a:buClrTx/>
+              <a:buSzTx/>
+              <a:buFontTx/>
+              <a:buNone/>
+              <a:tabLst/>
+              <a:defRPr/>
+            </a:pPr>
+            <a:r>
+              <a:rPr lang="en-US" dirty="0"/>
+              <a:t>“Here’s our roadmap. First, the PostgreSQL architecture: client–server, clusters, databases, schemas, physical files, shared memory, and background processes. Then Write-Ahead Logging, transactions and ACID, and MVCC for concurrency. We’ll touch system catalogs, then look at </a:t>
+            </a:r>
+            <a:r>
+              <a:rPr lang="en-US" dirty="0" err="1"/>
+              <a:t>Supabase’s</a:t>
+            </a:r>
+            <a:r>
+              <a:rPr lang="en-US" dirty="0"/>
+              <a:t> architecture and how it exposes Postgres with auth, REST, </a:t>
+            </a:r>
+            <a:r>
+              <a:rPr lang="en-US" dirty="0" err="1"/>
+              <a:t>realtime</a:t>
+            </a:r>
+            <a:r>
+              <a:rPr lang="en-US" dirty="0"/>
+              <a:t>, storage, and edge functions. Finally, we’ll run through the </a:t>
+            </a:r>
+            <a:r>
+              <a:rPr lang="en-US" dirty="0" err="1"/>
+              <a:t>Supabase</a:t>
+            </a:r>
+            <a:r>
+              <a:rPr lang="en-US" dirty="0"/>
+              <a:t> CLI so you can spin up a local stack quickly.”</a:t>
+            </a:r>
+          </a:p>
+          <a:p>
             <a:endParaRPr lang="en-US" dirty="0"/>
           </a:p>
         </p:txBody>
@@ -1858,7 +2576,10 @@
           <a:bodyPr/>
           <a:lstStyle/>
           <a:p>
-            <a:endParaRPr lang="en-US" dirty="0"/>
+            <a:r>
+              <a:rPr lang="en-US" dirty="0"/>
+              <a:t>“PostgreSQL runs as a dedicated server process called the postmaster. The postmaster initializes shared memory, listens for connections, and supervises child processes. Each client connection is handled by its own backend process. That isolation is important—one connection can’t corrupt another. Conceptually, think: postmaster in the middle, three clients on the left, and three independent backend processes on the right—one per client.”</a:t>
+            </a:r>
           </a:p>
         </p:txBody>
       </p:sp>
@@ -1949,7 +2670,79 @@
           <a:bodyPr/>
           <a:lstStyle/>
           <a:p>
-            <a:endParaRPr lang="en-US" dirty="0"/>
+            <a:r>
+              <a:rPr lang="en-US" dirty="0"/>
+              <a:t>“In Postgres, a </a:t>
+            </a:r>
+            <a:r>
+              <a:rPr lang="en-US" b="1" dirty="0"/>
+              <a:t>cluster</a:t>
+            </a:r>
+            <a:r>
+              <a:rPr lang="en-US" dirty="0"/>
+              <a:t> is the whole data directory on disk—think of it as the universe of files that Postgres manages. Inside the cluster, you can have multiple </a:t>
+            </a:r>
+            <a:r>
+              <a:rPr lang="en-US" b="1" dirty="0"/>
+              <a:t>databases</a:t>
+            </a:r>
+            <a:r>
+              <a:rPr lang="en-US" dirty="0"/>
+              <a:t>; each database is isolated. Within a database, you organize objects with </a:t>
+            </a:r>
+            <a:r>
+              <a:rPr lang="en-US" b="1" dirty="0"/>
+              <a:t>schemas</a:t>
+            </a:r>
+            <a:r>
+              <a:rPr lang="en-US" dirty="0"/>
+              <a:t> like </a:t>
+            </a:r>
+            <a:r>
+              <a:rPr lang="en-US" sz="1200" kern="1200" dirty="0">
+                <a:solidFill>
+                  <a:schemeClr val="tx1"/>
+                </a:solidFill>
+                <a:latin typeface="+mn-lt"/>
+                <a:ea typeface="+mn-ea"/>
+                <a:cs typeface="+mn-cs"/>
+              </a:rPr>
+              <a:t>public</a:t>
+            </a:r>
+            <a:r>
+              <a:rPr lang="en-US" dirty="0"/>
+              <a:t>, </a:t>
+            </a:r>
+            <a:r>
+              <a:rPr lang="en-US" sz="1200" kern="1200" dirty="0">
+                <a:solidFill>
+                  <a:schemeClr val="tx1"/>
+                </a:solidFill>
+                <a:latin typeface="+mn-lt"/>
+                <a:ea typeface="+mn-ea"/>
+                <a:cs typeface="+mn-cs"/>
+              </a:rPr>
+              <a:t>sales</a:t>
+            </a:r>
+            <a:r>
+              <a:rPr lang="en-US" dirty="0"/>
+              <a:t>, or </a:t>
+            </a:r>
+            <a:r>
+              <a:rPr lang="en-US" sz="1200" kern="1200" dirty="0">
+                <a:solidFill>
+                  <a:schemeClr val="tx1"/>
+                </a:solidFill>
+                <a:latin typeface="+mn-lt"/>
+                <a:ea typeface="+mn-ea"/>
+                <a:cs typeface="+mn-cs"/>
+              </a:rPr>
+              <a:t>analytics</a:t>
+            </a:r>
+            <a:r>
+              <a:rPr lang="en-US" dirty="0"/>
+              <a:t>. Tables, views, and functions live inside schemas. So, cluster → databases → schemas → objects. That hierarchy keeps projects clean and permissions sane.”</a:t>
+            </a:r>
           </a:p>
         </p:txBody>
       </p:sp>
@@ -2040,7 +2833,77 @@
           <a:bodyPr/>
           <a:lstStyle/>
           <a:p>
-            <a:endParaRPr lang="en-US" dirty="0"/>
+            <a:r>
+              <a:rPr lang="en-US" dirty="0"/>
+              <a:t>“A PostgreSQL cluster is literally a directory tree. Under </a:t>
+            </a:r>
+            <a:r>
+              <a:rPr lang="en-US" sz="1200" kern="1200" dirty="0">
+                <a:solidFill>
+                  <a:schemeClr val="tx1"/>
+                </a:solidFill>
+                <a:latin typeface="+mn-lt"/>
+                <a:ea typeface="+mn-ea"/>
+                <a:cs typeface="+mn-cs"/>
+              </a:rPr>
+              <a:t>base/</a:t>
+            </a:r>
+            <a:r>
+              <a:rPr lang="en-US" dirty="0"/>
+              <a:t>, each database has its own subdirectory holding its table and index files. The </a:t>
+            </a:r>
+            <a:r>
+              <a:rPr lang="en-US" sz="1200" kern="1200" dirty="0" err="1">
+                <a:solidFill>
+                  <a:schemeClr val="tx1"/>
+                </a:solidFill>
+                <a:latin typeface="+mn-lt"/>
+                <a:ea typeface="+mn-ea"/>
+                <a:cs typeface="+mn-cs"/>
+              </a:rPr>
+              <a:t>pg_wal</a:t>
+            </a:r>
+            <a:r>
+              <a:rPr lang="en-US" sz="1200" kern="1200" dirty="0">
+                <a:solidFill>
+                  <a:schemeClr val="tx1"/>
+                </a:solidFill>
+                <a:latin typeface="+mn-lt"/>
+                <a:ea typeface="+mn-ea"/>
+                <a:cs typeface="+mn-cs"/>
+              </a:rPr>
+              <a:t>/</a:t>
+            </a:r>
+            <a:r>
+              <a:rPr lang="en-US" dirty="0"/>
+              <a:t> directory stores Write-Ahead Log segment files—those are the append-only logs of every change. </a:t>
+            </a:r>
+            <a:r>
+              <a:rPr lang="en-US" sz="1200" kern="1200" dirty="0" err="1">
+                <a:solidFill>
+                  <a:schemeClr val="tx1"/>
+                </a:solidFill>
+                <a:latin typeface="+mn-lt"/>
+                <a:ea typeface="+mn-ea"/>
+                <a:cs typeface="+mn-cs"/>
+              </a:rPr>
+              <a:t>pg_global</a:t>
+            </a:r>
+            <a:r>
+              <a:rPr lang="en-US" sz="1200" kern="1200" dirty="0">
+                <a:solidFill>
+                  <a:schemeClr val="tx1"/>
+                </a:solidFill>
+                <a:latin typeface="+mn-lt"/>
+                <a:ea typeface="+mn-ea"/>
+                <a:cs typeface="+mn-cs"/>
+              </a:rPr>
+              <a:t>/</a:t>
+            </a:r>
+            <a:r>
+              <a:rPr lang="en-US" dirty="0"/>
+              <a:t> holds cluster-wide tables, and stats and temp files live under the stats paths. When you diagnose performance or recover from issues, knowing where these directories live really helps.”</a:t>
+            </a:r>
           </a:p>
         </p:txBody>
       </p:sp>
@@ -2131,7 +2994,41 @@
           <a:bodyPr/>
           <a:lstStyle/>
           <a:p>
-            <a:endParaRPr lang="en-US" dirty="0"/>
+            <a:r>
+              <a:rPr lang="en-US" dirty="0"/>
+              <a:t>“Postgres relies on shared memory to speed up I/O. </a:t>
+            </a:r>
+            <a:r>
+              <a:rPr lang="en-US" b="1" dirty="0"/>
+              <a:t>Shared buffers</a:t>
+            </a:r>
+            <a:r>
+              <a:rPr lang="en-US" dirty="0"/>
+              <a:t> cache database pages so we don’t hit disk for every read. </a:t>
+            </a:r>
+            <a:r>
+              <a:rPr lang="en-US" b="1" dirty="0"/>
+              <a:t>WAL buffers</a:t>
+            </a:r>
+            <a:r>
+              <a:rPr lang="en-US" dirty="0"/>
+              <a:t> temporarily hold log records before they’re flushed to </a:t>
+            </a:r>
+            <a:r>
+              <a:rPr lang="en-US" sz="1200" kern="1200" dirty="0" err="1">
+                <a:solidFill>
+                  <a:schemeClr val="tx1"/>
+                </a:solidFill>
+                <a:latin typeface="+mn-lt"/>
+                <a:ea typeface="+mn-ea"/>
+                <a:cs typeface="+mn-cs"/>
+              </a:rPr>
+              <a:t>pg_wal</a:t>
+            </a:r>
+            <a:r>
+              <a:rPr lang="en-US" dirty="0"/>
+              <a:t>. Both are configured at server start and tuned based on workload. In short: hot data stays in shared buffers for fast reads, and WAL buffers smooth write performance by batching log records.”</a:t>
+            </a:r>
           </a:p>
         </p:txBody>
       </p:sp>
@@ -2222,7 +3119,42 @@
           <a:bodyPr/>
           <a:lstStyle/>
           <a:p>
-            <a:endParaRPr lang="en-US" dirty="0"/>
+            <a:r>
+              <a:rPr lang="en-US" dirty="0"/>
+              <a:t>“There are a handful of always-on helpers. </a:t>
+            </a:r>
+            <a:r>
+              <a:rPr lang="en-US" b="1" dirty="0" err="1"/>
+              <a:t>Autovacuum</a:t>
+            </a:r>
+            <a:r>
+              <a:rPr lang="en-US" dirty="0"/>
+              <a:t> reclaims space from dead rows and refreshes statistics so the planner stays smart and tables don’t bloat. The </a:t>
+            </a:r>
+            <a:r>
+              <a:rPr lang="en-US" b="1" dirty="0"/>
+              <a:t>background writer</a:t>
+            </a:r>
+            <a:r>
+              <a:rPr lang="en-US" dirty="0"/>
+              <a:t> trickles dirty buffers to disk to avoid sudden spikes. The </a:t>
+            </a:r>
+            <a:r>
+              <a:rPr lang="en-US" b="1" dirty="0"/>
+              <a:t>WAL writer</a:t>
+            </a:r>
+            <a:r>
+              <a:rPr lang="en-US" dirty="0"/>
+              <a:t> flushes WAL buffers regularly so we maintain durability without writing data pages all the time. And the </a:t>
+            </a:r>
+            <a:r>
+              <a:rPr lang="en-US" b="1" dirty="0" err="1"/>
+              <a:t>checkpointer</a:t>
+            </a:r>
+            <a:r>
+              <a:rPr lang="en-US" dirty="0"/>
+              <a:t> takes coordinated snapshots—checkpoints—that bound recovery time after a crash.”</a:t>
+            </a:r>
           </a:p>
         </p:txBody>
       </p:sp>
@@ -2313,7 +3245,42 @@
           <a:bodyPr/>
           <a:lstStyle/>
           <a:p>
-            <a:endParaRPr lang="en-US" dirty="0"/>
+            <a:r>
+              <a:rPr lang="en-US" dirty="0"/>
+              <a:t>“More helpers: the </a:t>
+            </a:r>
+            <a:r>
+              <a:rPr lang="en-US" b="1" dirty="0"/>
+              <a:t>stats collector</a:t>
+            </a:r>
+            <a:r>
+              <a:rPr lang="en-US" dirty="0"/>
+              <a:t> gathers activity and performance metrics for the planner and monitoring. The </a:t>
+            </a:r>
+            <a:r>
+              <a:rPr lang="en-US" b="1" dirty="0"/>
+              <a:t>logger</a:t>
+            </a:r>
+            <a:r>
+              <a:rPr lang="en-US" dirty="0"/>
+              <a:t> records server messages and errors—this is your first stop in incident response. The </a:t>
+            </a:r>
+            <a:r>
+              <a:rPr lang="en-US" b="1" dirty="0"/>
+              <a:t>archiver</a:t>
+            </a:r>
+            <a:r>
+              <a:rPr lang="en-US" dirty="0"/>
+              <a:t> ships completed WAL segments off to long-term storage so you can do point-in-time recovery. And </a:t>
+            </a:r>
+            <a:r>
+              <a:rPr lang="en-US" b="1" dirty="0"/>
+              <a:t>WAL receiver/sender</a:t>
+            </a:r>
+            <a:r>
+              <a:rPr lang="en-US" dirty="0"/>
+              <a:t> processes move WAL between primary and standby nodes for replication.”</a:t>
+            </a:r>
           </a:p>
         </p:txBody>
       </p:sp>
@@ -2404,7 +3371,26 @@
           <a:bodyPr/>
           <a:lstStyle/>
           <a:p>
-            <a:endParaRPr lang="en-US" dirty="0"/>
+            <a:r>
+              <a:rPr lang="en-US" dirty="0"/>
+              <a:t>“Here’s the golden rule: </a:t>
+            </a:r>
+            <a:r>
+              <a:rPr lang="en-US" b="1" dirty="0"/>
+              <a:t>every change is written to the WAL first</a:t>
+            </a:r>
+            <a:r>
+              <a:rPr lang="en-US" dirty="0"/>
+              <a:t>, sequentially, before it touches the data files. Sequential I/O is fast and crash-safe. If the server crashes, on restart PostgreSQL </a:t>
+            </a:r>
+            <a:r>
+              <a:rPr lang="en-US" b="1" dirty="0"/>
+              <a:t>replays the WAL</a:t>
+            </a:r>
+            <a:r>
+              <a:rPr lang="en-US" dirty="0"/>
+              <a:t> to rebuild any pages that weren’t flushed, bringing the database back to a consistent state. WAL also powers replication—those same records are streamed to standbys.”</a:t>
+            </a:r>
           </a:p>
         </p:txBody>
       </p:sp>
@@ -4406,7 +5392,7 @@
         </p:nvGraphicFramePr>
         <p:xfrm>
           <a:off x="548640" y="1737360"/>
-          <a:ext cx="5029200" cy="914400"/>
+          <a:ext cx="5029200" cy="1645920"/>
         </p:xfrm>
         <a:graphic>
           <a:graphicData uri="http://schemas.openxmlformats.org/drawingml/2006/table">
@@ -5900,8 +6886,8 @@
         </p:nvSpPr>
         <p:spPr>
           <a:xfrm>
-            <a:off x="548640" y="4297680"/>
-            <a:ext cx="8229600" cy="1371600"/>
+            <a:off x="5120638" y="0"/>
+            <a:ext cx="2103121" cy="5669280"/>
           </a:xfrm>
           <a:prstGeom prst="rect">
             <a:avLst/>
@@ -5934,8 +6920,23 @@
                   <a:srgbClr val="030A18"/>
                 </a:solidFill>
               </a:rPr>
-              <a:t>• GoTrue – Auth &amp; user management
-• PostgREST – Auto‑generates a REST API over your tables
+              <a:t>• GoTrue – Auth &amp; user </a:t>
+            </a:r>
+            <a:r>
+              <a:rPr lang="en-US" sz="1200" dirty="0" err="1">
+                <a:solidFill>
+                  <a:srgbClr val="030A18"/>
+                </a:solidFill>
+              </a:rPr>
+              <a:t>managementyour</a:t>
+            </a:r>
+            <a:r>
+              <a:rPr lang="en-US" sz="1200" dirty="0">
+                <a:solidFill>
+                  <a:srgbClr val="030A18"/>
+                </a:solidFill>
+              </a:rPr>
+              <a:t> tables
 • Realtime – WebSocket server streaming database changes
 • Storage – S3‑compatible object storage for files
 • Edge Functions – Serverless functions executed in Deno
@@ -7535,7 +8536,7 @@
                 <a:ea typeface="Arial" pitchFamily="34" charset="-122"/>
                 <a:cs typeface="Arial" pitchFamily="34" charset="-120"/>
               </a:rPr>
-              <a:t>Discussion &amp; Quiz Questions</a:t>
+              <a:t>Discussion &amp; Questions</a:t>
             </a:r>
             <a:endParaRPr lang="en-US" sz="2400" dirty="0"/>
           </a:p>
